--- a/material/Data Analysis/02_numpy(1).pptx
+++ b/material/Data Analysis/02_numpy(1).pptx
@@ -1,6 +1,6 @@
 
 <file path=ppt/presentation.xml><?xml version="1.0" encoding="utf-8"?>
-<p:presentation xmlns:a="http://schemas.openxmlformats.org/drawingml/2006/main" xmlns:r="http://schemas.openxmlformats.org/officeDocument/2006/relationships" xmlns:p="http://schemas.openxmlformats.org/presentationml/2006/main" saveSubsetFonts="1">
+<p:presentation xmlns:a="http://schemas.openxmlformats.org/drawingml/2006/main" xmlns:r="http://schemas.openxmlformats.org/officeDocument/2006/relationships" xmlns:p="http://schemas.openxmlformats.org/presentationml/2006/main" embedTrueTypeFonts="1" saveSubsetFonts="1">
   <p:sldMasterIdLst>
     <p:sldMasterId id="2147483660" r:id="rId1"/>
   </p:sldMasterIdLst>
@@ -75,6 +75,34 @@
   </p:sldIdLst>
   <p:sldSz cx="12192000" cy="6858000"/>
   <p:notesSz cx="6858000" cy="9144000"/>
+  <p:embeddedFontLst>
+    <p:embeddedFont>
+      <p:font typeface="G마켓 산스 TTF Bold" panose="02000000000000000000" pitchFamily="2" charset="-127"/>
+      <p:bold r:id="rId67"/>
+    </p:embeddedFont>
+    <p:embeddedFont>
+      <p:font typeface="Pretendard Black" panose="02000A03000000020004" pitchFamily="2" charset="-127"/>
+      <p:bold r:id="rId68"/>
+    </p:embeddedFont>
+    <p:embeddedFont>
+      <p:font typeface="Pretendard Light" panose="02000403000000020004" pitchFamily="2" charset="-127"/>
+      <p:regular r:id="rId69"/>
+    </p:embeddedFont>
+    <p:embeddedFont>
+      <p:font typeface="Pretendard Medium" panose="02000603000000020004" pitchFamily="2" charset="-127"/>
+      <p:regular r:id="rId70"/>
+    </p:embeddedFont>
+    <p:embeddedFont>
+      <p:font typeface="맑은 고딕" panose="020B0503020000020004" pitchFamily="50" charset="-127"/>
+      <p:regular r:id="rId71"/>
+      <p:bold r:id="rId72"/>
+    </p:embeddedFont>
+    <p:embeddedFont>
+      <p:font typeface="메이플스토리" panose="02000300000000000000" pitchFamily="2" charset="-127"/>
+      <p:regular r:id="rId73"/>
+      <p:bold r:id="rId74"/>
+    </p:embeddedFont>
+  </p:embeddedFontLst>
   <p:defaultTextStyle>
     <a:defPPr>
       <a:defRPr lang="ko-KR"/>
@@ -281,7 +309,7 @@
             <a:fld id="{A13A867C-D490-40C2-AB8D-A60FA70A9BF5}" type="datetimeFigureOut">
               <a:rPr lang="ko-KR" altLang="en-US" smtClean="0"/>
               <a:pPr/>
-              <a:t>2025-08-01</a:t>
+              <a:t>2025-08-21</a:t>
             </a:fld>
             <a:endParaRPr lang="ko-KR" altLang="en-US" dirty="0"/>
           </a:p>
@@ -6628,7 +6656,7 @@
           <a:p>
             <a:fld id="{442BEE3F-2E9A-4FD8-8B8A-8619F3E161C0}" type="datetime1">
               <a:rPr lang="ko-KR" altLang="en-US" smtClean="0"/>
-              <a:t>2025-08-01</a:t>
+              <a:t>2025-08-21</a:t>
             </a:fld>
             <a:endParaRPr lang="ko-KR" altLang="en-US"/>
           </a:p>
@@ -6915,7 +6943,7 @@
           <a:p>
             <a:fld id="{0F78D9C4-20C1-4B15-A116-16DC77AD9A1E}" type="datetime1">
               <a:rPr lang="ko-KR" altLang="en-US" smtClean="0"/>
-              <a:t>2025-08-01</a:t>
+              <a:t>2025-08-21</a:t>
             </a:fld>
             <a:endParaRPr lang="ko-KR" altLang="en-US"/>
           </a:p>
@@ -7090,7 +7118,7 @@
           <a:p>
             <a:fld id="{7F5E23C3-0E3D-4E4E-8486-D7FB4C073DC1}" type="datetime1">
               <a:rPr lang="ko-KR" altLang="en-US" smtClean="0"/>
-              <a:t>2025-08-01</a:t>
+              <a:t>2025-08-21</a:t>
             </a:fld>
             <a:endParaRPr lang="ko-KR" altLang="en-US"/>
           </a:p>
@@ -7419,7 +7447,7 @@
           <a:p>
             <a:fld id="{7F5E23C3-0E3D-4E4E-8486-D7FB4C073DC1}" type="datetime1">
               <a:rPr lang="ko-KR" altLang="en-US" smtClean="0"/>
-              <a:t>2025-08-01</a:t>
+              <a:t>2025-08-21</a:t>
             </a:fld>
             <a:endParaRPr lang="ko-KR" altLang="en-US"/>
           </a:p>
@@ -8261,7 +8289,7 @@
           <a:p>
             <a:fld id="{0F78D9C4-20C1-4B15-A116-16DC77AD9A1E}" type="datetime1">
               <a:rPr lang="ko-KR" altLang="en-US" smtClean="0"/>
-              <a:t>2025-08-01</a:t>
+              <a:t>2025-08-21</a:t>
             </a:fld>
             <a:endParaRPr lang="ko-KR" altLang="en-US" dirty="0"/>
           </a:p>
@@ -8636,7 +8664,7 @@
           <a:p>
             <a:fld id="{0F78D9C4-20C1-4B15-A116-16DC77AD9A1E}" type="datetime1">
               <a:rPr lang="ko-KR" altLang="en-US" smtClean="0"/>
-              <a:t>2025-08-01</a:t>
+              <a:t>2025-08-21</a:t>
             </a:fld>
             <a:endParaRPr lang="ko-KR" altLang="en-US" dirty="0"/>
           </a:p>
@@ -10827,7 +10855,7 @@
           <a:p>
             <a:fld id="{0F78D9C4-20C1-4B15-A116-16DC77AD9A1E}" type="datetime1">
               <a:rPr lang="ko-KR" altLang="en-US" smtClean="0"/>
-              <a:t>2025-08-01</a:t>
+              <a:t>2025-08-21</a:t>
             </a:fld>
             <a:endParaRPr lang="ko-KR" altLang="en-US" dirty="0"/>
           </a:p>
@@ -11329,7 +11357,7 @@
           <a:p>
             <a:fld id="{0F78D9C4-20C1-4B15-A116-16DC77AD9A1E}" type="datetime1">
               <a:rPr lang="ko-KR" altLang="en-US" smtClean="0"/>
-              <a:t>2025-08-01</a:t>
+              <a:t>2025-08-21</a:t>
             </a:fld>
             <a:endParaRPr lang="ko-KR" altLang="en-US" dirty="0"/>
           </a:p>
@@ -11858,7 +11886,7 @@
           <a:p>
             <a:fld id="{0F78D9C4-20C1-4B15-A116-16DC77AD9A1E}" type="datetime1">
               <a:rPr lang="ko-KR" altLang="en-US" smtClean="0"/>
-              <a:t>2025-08-01</a:t>
+              <a:t>2025-08-21</a:t>
             </a:fld>
             <a:endParaRPr lang="ko-KR" altLang="en-US" dirty="0"/>
           </a:p>
@@ -12244,7 +12272,7 @@
           <a:p>
             <a:fld id="{0F78D9C4-20C1-4B15-A116-16DC77AD9A1E}" type="datetime1">
               <a:rPr lang="ko-KR" altLang="en-US" smtClean="0"/>
-              <a:t>2025-08-01</a:t>
+              <a:t>2025-08-21</a:t>
             </a:fld>
             <a:endParaRPr lang="ko-KR" altLang="en-US" dirty="0"/>
           </a:p>
@@ -12581,7 +12609,7 @@
           <a:p>
             <a:fld id="{0F78D9C4-20C1-4B15-A116-16DC77AD9A1E}" type="datetime1">
               <a:rPr lang="ko-KR" altLang="en-US" smtClean="0"/>
-              <a:t>2025-08-01</a:t>
+              <a:t>2025-08-21</a:t>
             </a:fld>
             <a:endParaRPr lang="ko-KR" altLang="en-US" dirty="0"/>
           </a:p>
@@ -12764,7 +12792,7 @@
           <a:p>
             <a:fld id="{0F78D9C4-20C1-4B15-A116-16DC77AD9A1E}" type="datetime1">
               <a:rPr lang="ko-KR" altLang="en-US" smtClean="0"/>
-              <a:t>2025-08-01</a:t>
+              <a:t>2025-08-21</a:t>
             </a:fld>
             <a:endParaRPr lang="ko-KR" altLang="en-US" dirty="0"/>
           </a:p>
@@ -12983,7 +13011,7 @@
           <a:p>
             <a:fld id="{0F78D9C4-20C1-4B15-A116-16DC77AD9A1E}" type="datetime1">
               <a:rPr lang="ko-KR" altLang="en-US" smtClean="0"/>
-              <a:t>2025-08-01</a:t>
+              <a:t>2025-08-21</a:t>
             </a:fld>
             <a:endParaRPr lang="ko-KR" altLang="en-US" dirty="0"/>
           </a:p>
@@ -13246,7 +13274,7 @@
           <a:p>
             <a:fld id="{0F78D9C4-20C1-4B15-A116-16DC77AD9A1E}" type="datetime1">
               <a:rPr lang="ko-KR" altLang="en-US" smtClean="0"/>
-              <a:t>2025-08-01</a:t>
+              <a:t>2025-08-21</a:t>
             </a:fld>
             <a:endParaRPr lang="ko-KR" altLang="en-US" dirty="0"/>
           </a:p>
@@ -13426,7 +13454,7 @@
           <a:p>
             <a:fld id="{0F78D9C4-20C1-4B15-A116-16DC77AD9A1E}" type="datetime1">
               <a:rPr lang="ko-KR" altLang="en-US" smtClean="0"/>
-              <a:t>2025-08-01</a:t>
+              <a:t>2025-08-21</a:t>
             </a:fld>
             <a:endParaRPr lang="ko-KR" altLang="en-US" dirty="0"/>
           </a:p>
@@ -13950,7 +13978,7 @@
           <a:p>
             <a:fld id="{0F78D9C4-20C1-4B15-A116-16DC77AD9A1E}" type="datetime1">
               <a:rPr lang="ko-KR" altLang="en-US" smtClean="0"/>
-              <a:t>2025-08-01</a:t>
+              <a:t>2025-08-21</a:t>
             </a:fld>
             <a:endParaRPr lang="ko-KR" altLang="en-US" dirty="0"/>
           </a:p>
@@ -14257,7 +14285,7 @@
           <a:p>
             <a:fld id="{0F78D9C4-20C1-4B15-A116-16DC77AD9A1E}" type="datetime1">
               <a:rPr lang="ko-KR" altLang="en-US" smtClean="0"/>
-              <a:t>2025-08-01</a:t>
+              <a:t>2025-08-21</a:t>
             </a:fld>
             <a:endParaRPr lang="ko-KR" altLang="en-US" dirty="0"/>
           </a:p>
@@ -14505,7 +14533,7 @@
           <a:p>
             <a:fld id="{0F78D9C4-20C1-4B15-A116-16DC77AD9A1E}" type="datetime1">
               <a:rPr lang="ko-KR" altLang="en-US" smtClean="0"/>
-              <a:t>2025-08-01</a:t>
+              <a:t>2025-08-21</a:t>
             </a:fld>
             <a:endParaRPr lang="ko-KR" altLang="en-US" dirty="0"/>
           </a:p>
@@ -15163,7 +15191,7 @@
           <a:p>
             <a:fld id="{0F78D9C4-20C1-4B15-A116-16DC77AD9A1E}" type="datetime1">
               <a:rPr lang="ko-KR" altLang="en-US" smtClean="0"/>
-              <a:t>2025-08-01</a:t>
+              <a:t>2025-08-21</a:t>
             </a:fld>
             <a:endParaRPr lang="ko-KR" altLang="en-US" dirty="0"/>
           </a:p>
@@ -15463,7 +15491,7 @@
           <a:p>
             <a:fld id="{0F78D9C4-20C1-4B15-A116-16DC77AD9A1E}" type="datetime1">
               <a:rPr lang="ko-KR" altLang="en-US" smtClean="0"/>
-              <a:t>2025-08-01</a:t>
+              <a:t>2025-08-21</a:t>
             </a:fld>
             <a:endParaRPr lang="ko-KR" altLang="en-US" dirty="0"/>
           </a:p>
@@ -15791,7 +15819,7 @@
           <a:p>
             <a:fld id="{0F78D9C4-20C1-4B15-A116-16DC77AD9A1E}" type="datetime1">
               <a:rPr lang="ko-KR" altLang="en-US" smtClean="0"/>
-              <a:t>2025-08-01</a:t>
+              <a:t>2025-08-21</a:t>
             </a:fld>
             <a:endParaRPr lang="ko-KR" altLang="en-US" dirty="0"/>
           </a:p>
@@ -16120,7 +16148,7 @@
           <a:p>
             <a:fld id="{0F78D9C4-20C1-4B15-A116-16DC77AD9A1E}" type="datetime1">
               <a:rPr lang="ko-KR" altLang="en-US" smtClean="0"/>
-              <a:t>2025-08-01</a:t>
+              <a:t>2025-08-21</a:t>
             </a:fld>
             <a:endParaRPr lang="ko-KR" altLang="en-US" dirty="0"/>
           </a:p>
@@ -16441,7 +16469,7 @@
           <a:p>
             <a:fld id="{0F78D9C4-20C1-4B15-A116-16DC77AD9A1E}" type="datetime1">
               <a:rPr lang="ko-KR" altLang="en-US" smtClean="0"/>
-              <a:t>2025-08-01</a:t>
+              <a:t>2025-08-21</a:t>
             </a:fld>
             <a:endParaRPr lang="ko-KR" altLang="en-US" dirty="0"/>
           </a:p>
@@ -16714,7 +16742,7 @@
           <a:p>
             <a:fld id="{0F78D9C4-20C1-4B15-A116-16DC77AD9A1E}" type="datetime1">
               <a:rPr lang="ko-KR" altLang="en-US" smtClean="0"/>
-              <a:t>2025-08-01</a:t>
+              <a:t>2025-08-21</a:t>
             </a:fld>
             <a:endParaRPr lang="ko-KR" altLang="en-US" dirty="0"/>
           </a:p>
@@ -16997,7 +17025,7 @@
           <a:p>
             <a:fld id="{0F78D9C4-20C1-4B15-A116-16DC77AD9A1E}" type="datetime1">
               <a:rPr lang="ko-KR" altLang="en-US" smtClean="0"/>
-              <a:t>2025-08-01</a:t>
+              <a:t>2025-08-21</a:t>
             </a:fld>
             <a:endParaRPr lang="ko-KR" altLang="en-US" dirty="0"/>
           </a:p>
@@ -17512,7 +17540,7 @@
           <a:p>
             <a:fld id="{0F78D9C4-20C1-4B15-A116-16DC77AD9A1E}" type="datetime1">
               <a:rPr lang="ko-KR" altLang="en-US" smtClean="0"/>
-              <a:t>2025-08-01</a:t>
+              <a:t>2025-08-21</a:t>
             </a:fld>
             <a:endParaRPr lang="ko-KR" altLang="en-US" dirty="0"/>
           </a:p>
@@ -19496,7 +19524,7 @@
           <a:p>
             <a:fld id="{0F78D9C4-20C1-4B15-A116-16DC77AD9A1E}" type="datetime1">
               <a:rPr lang="ko-KR" altLang="en-US" smtClean="0"/>
-              <a:t>2025-08-01</a:t>
+              <a:t>2025-08-21</a:t>
             </a:fld>
             <a:endParaRPr lang="ko-KR" altLang="en-US" dirty="0"/>
           </a:p>
@@ -20366,7 +20394,7 @@
           <a:p>
             <a:fld id="{0F78D9C4-20C1-4B15-A116-16DC77AD9A1E}" type="datetime1">
               <a:rPr lang="ko-KR" altLang="en-US" smtClean="0"/>
-              <a:t>2025-08-01</a:t>
+              <a:t>2025-08-21</a:t>
             </a:fld>
             <a:endParaRPr lang="ko-KR" altLang="en-US"/>
           </a:p>
@@ -20833,7 +20861,7 @@
           <a:p>
             <a:fld id="{0F78D9C4-20C1-4B15-A116-16DC77AD9A1E}" type="datetime1">
               <a:rPr lang="ko-KR" altLang="en-US" smtClean="0"/>
-              <a:t>2025-08-01</a:t>
+              <a:t>2025-08-21</a:t>
             </a:fld>
             <a:endParaRPr lang="ko-KR" altLang="en-US"/>
           </a:p>
@@ -21150,7 +21178,7 @@
           <a:p>
             <a:fld id="{0F78D9C4-20C1-4B15-A116-16DC77AD9A1E}" type="datetime1">
               <a:rPr lang="ko-KR" altLang="en-US" smtClean="0"/>
-              <a:t>2025-08-01</a:t>
+              <a:t>2025-08-21</a:t>
             </a:fld>
             <a:endParaRPr lang="ko-KR" altLang="en-US" dirty="0"/>
           </a:p>
@@ -21565,7 +21593,7 @@
           <a:p>
             <a:fld id="{0F78D9C4-20C1-4B15-A116-16DC77AD9A1E}" type="datetime1">
               <a:rPr lang="ko-KR" altLang="en-US" smtClean="0"/>
-              <a:t>2025-08-01</a:t>
+              <a:t>2025-08-21</a:t>
             </a:fld>
             <a:endParaRPr lang="ko-KR" altLang="en-US" dirty="0"/>
           </a:p>
@@ -22216,7 +22244,7 @@
           <a:p>
             <a:fld id="{0F78D9C4-20C1-4B15-A116-16DC77AD9A1E}" type="datetime1">
               <a:rPr lang="ko-KR" altLang="en-US" smtClean="0"/>
-              <a:t>2025-08-01</a:t>
+              <a:t>2025-08-21</a:t>
             </a:fld>
             <a:endParaRPr lang="ko-KR" altLang="en-US" dirty="0"/>
           </a:p>
@@ -22912,7 +22940,7 @@
           <a:p>
             <a:fld id="{0F78D9C4-20C1-4B15-A116-16DC77AD9A1E}" type="datetime1">
               <a:rPr lang="ko-KR" altLang="en-US" smtClean="0"/>
-              <a:t>2025-08-01</a:t>
+              <a:t>2025-08-21</a:t>
             </a:fld>
             <a:endParaRPr lang="ko-KR" altLang="en-US" dirty="0"/>
           </a:p>
@@ -23578,7 +23606,7 @@
           <a:p>
             <a:fld id="{0F78D9C4-20C1-4B15-A116-16DC77AD9A1E}" type="datetime1">
               <a:rPr lang="ko-KR" altLang="en-US" smtClean="0"/>
-              <a:t>2025-08-01</a:t>
+              <a:t>2025-08-21</a:t>
             </a:fld>
             <a:endParaRPr lang="ko-KR" altLang="en-US" dirty="0"/>
           </a:p>
@@ -24185,7 +24213,7 @@
           <a:p>
             <a:fld id="{0F78D9C4-20C1-4B15-A116-16DC77AD9A1E}" type="datetime1">
               <a:rPr lang="ko-KR" altLang="en-US" smtClean="0"/>
-              <a:t>2025-08-01</a:t>
+              <a:t>2025-08-21</a:t>
             </a:fld>
             <a:endParaRPr lang="ko-KR" altLang="en-US" dirty="0"/>
           </a:p>
@@ -24653,7 +24681,7 @@
           <a:p>
             <a:fld id="{0F78D9C4-20C1-4B15-A116-16DC77AD9A1E}" type="datetime1">
               <a:rPr lang="ko-KR" altLang="en-US" smtClean="0"/>
-              <a:t>2025-08-01</a:t>
+              <a:t>2025-08-21</a:t>
             </a:fld>
             <a:endParaRPr lang="ko-KR" altLang="en-US" dirty="0"/>
           </a:p>
@@ -25110,7 +25138,7 @@
           <a:p>
             <a:fld id="{0F78D9C4-20C1-4B15-A116-16DC77AD9A1E}" type="datetime1">
               <a:rPr lang="ko-KR" altLang="en-US" smtClean="0"/>
-              <a:t>2025-08-01</a:t>
+              <a:t>2025-08-21</a:t>
             </a:fld>
             <a:endParaRPr lang="ko-KR" altLang="en-US" dirty="0"/>
           </a:p>
@@ -25487,7 +25515,7 @@
           <a:p>
             <a:fld id="{0F78D9C4-20C1-4B15-A116-16DC77AD9A1E}" type="datetime1">
               <a:rPr lang="ko-KR" altLang="en-US" smtClean="0"/>
-              <a:t>2025-08-01</a:t>
+              <a:t>2025-08-21</a:t>
             </a:fld>
             <a:endParaRPr lang="ko-KR" altLang="en-US" dirty="0"/>
           </a:p>
@@ -25865,7 +25893,7 @@
           <a:p>
             <a:fld id="{0F78D9C4-20C1-4B15-A116-16DC77AD9A1E}" type="datetime1">
               <a:rPr lang="ko-KR" altLang="en-US" smtClean="0"/>
-              <a:t>2025-08-01</a:t>
+              <a:t>2025-08-21</a:t>
             </a:fld>
             <a:endParaRPr lang="ko-KR" altLang="en-US" dirty="0"/>
           </a:p>
@@ -26444,7 +26472,7 @@
           <a:p>
             <a:fld id="{0F78D9C4-20C1-4B15-A116-16DC77AD9A1E}" type="datetime1">
               <a:rPr lang="ko-KR" altLang="en-US" smtClean="0"/>
-              <a:t>2025-08-01</a:t>
+              <a:t>2025-08-21</a:t>
             </a:fld>
             <a:endParaRPr lang="ko-KR" altLang="en-US" dirty="0"/>
           </a:p>
@@ -27099,7 +27127,7 @@
           <a:p>
             <a:fld id="{0F78D9C4-20C1-4B15-A116-16DC77AD9A1E}" type="datetime1">
               <a:rPr lang="ko-KR" altLang="en-US" smtClean="0"/>
-              <a:t>2025-08-01</a:t>
+              <a:t>2025-08-21</a:t>
             </a:fld>
             <a:endParaRPr lang="ko-KR" altLang="en-US" dirty="0"/>
           </a:p>
@@ -27702,7 +27730,7 @@
           <a:p>
             <a:fld id="{0F78D9C4-20C1-4B15-A116-16DC77AD9A1E}" type="datetime1">
               <a:rPr lang="ko-KR" altLang="en-US" smtClean="0"/>
-              <a:t>2025-08-01</a:t>
+              <a:t>2025-08-21</a:t>
             </a:fld>
             <a:endParaRPr lang="ko-KR" altLang="en-US" dirty="0"/>
           </a:p>
@@ -28281,7 +28309,7 @@
           <a:p>
             <a:fld id="{0F78D9C4-20C1-4B15-A116-16DC77AD9A1E}" type="datetime1">
               <a:rPr lang="ko-KR" altLang="en-US" smtClean="0"/>
-              <a:t>2025-08-01</a:t>
+              <a:t>2025-08-21</a:t>
             </a:fld>
             <a:endParaRPr lang="ko-KR" altLang="en-US" dirty="0"/>
           </a:p>
@@ -29161,7 +29189,7 @@
           <a:p>
             <a:fld id="{0F78D9C4-20C1-4B15-A116-16DC77AD9A1E}" type="datetime1">
               <a:rPr lang="ko-KR" altLang="en-US" smtClean="0"/>
-              <a:t>2025-08-01</a:t>
+              <a:t>2025-08-21</a:t>
             </a:fld>
             <a:endParaRPr lang="ko-KR" altLang="en-US"/>
           </a:p>
@@ -29668,7 +29696,7 @@
           <a:p>
             <a:fld id="{0F78D9C4-20C1-4B15-A116-16DC77AD9A1E}" type="datetime1">
               <a:rPr lang="ko-KR" altLang="en-US" smtClean="0"/>
-              <a:t>2025-08-01</a:t>
+              <a:t>2025-08-21</a:t>
             </a:fld>
             <a:endParaRPr lang="ko-KR" altLang="en-US"/>
           </a:p>
@@ -30093,7 +30121,7 @@
           <a:p>
             <a:fld id="{0F78D9C4-20C1-4B15-A116-16DC77AD9A1E}" type="datetime1">
               <a:rPr lang="ko-KR" altLang="en-US" smtClean="0"/>
-              <a:t>2025-08-01</a:t>
+              <a:t>2025-08-21</a:t>
             </a:fld>
             <a:endParaRPr lang="ko-KR" altLang="en-US"/>
           </a:p>
@@ -30280,7 +30308,7 @@
           <a:p>
             <a:fld id="{0F78D9C4-20C1-4B15-A116-16DC77AD9A1E}" type="datetime1">
               <a:rPr lang="ko-KR" altLang="en-US" smtClean="0"/>
-              <a:t>2025-08-01</a:t>
+              <a:t>2025-08-21</a:t>
             </a:fld>
             <a:endParaRPr lang="ko-KR" altLang="en-US" dirty="0"/>
           </a:p>
@@ -31044,7 +31072,7 @@
           <a:p>
             <a:fld id="{0F78D9C4-20C1-4B15-A116-16DC77AD9A1E}" type="datetime1">
               <a:rPr lang="ko-KR" altLang="en-US" smtClean="0"/>
-              <a:t>2025-08-01</a:t>
+              <a:t>2025-08-21</a:t>
             </a:fld>
             <a:endParaRPr lang="ko-KR" altLang="en-US"/>
           </a:p>
@@ -31435,7 +31463,7 @@
           <a:p>
             <a:fld id="{0F78D9C4-20C1-4B15-A116-16DC77AD9A1E}" type="datetime1">
               <a:rPr lang="ko-KR" altLang="en-US" smtClean="0"/>
-              <a:t>2025-08-01</a:t>
+              <a:t>2025-08-21</a:t>
             </a:fld>
             <a:endParaRPr lang="ko-KR" altLang="en-US"/>
           </a:p>
@@ -31740,7 +31768,7 @@
           <a:p>
             <a:fld id="{0F78D9C4-20C1-4B15-A116-16DC77AD9A1E}" type="datetime1">
               <a:rPr lang="ko-KR" altLang="en-US" smtClean="0"/>
-              <a:t>2025-08-01</a:t>
+              <a:t>2025-08-21</a:t>
             </a:fld>
             <a:endParaRPr lang="ko-KR" altLang="en-US"/>
           </a:p>
@@ -32162,7 +32190,7 @@
           <a:p>
             <a:fld id="{0F78D9C4-20C1-4B15-A116-16DC77AD9A1E}" type="datetime1">
               <a:rPr lang="ko-KR" altLang="en-US" smtClean="0"/>
-              <a:t>2025-08-01</a:t>
+              <a:t>2025-08-21</a:t>
             </a:fld>
             <a:endParaRPr lang="ko-KR" altLang="en-US"/>
           </a:p>
@@ -32445,7 +32473,7 @@
           <a:p>
             <a:fld id="{0F78D9C4-20C1-4B15-A116-16DC77AD9A1E}" type="datetime1">
               <a:rPr lang="ko-KR" altLang="en-US" smtClean="0"/>
-              <a:t>2025-08-01</a:t>
+              <a:t>2025-08-21</a:t>
             </a:fld>
             <a:endParaRPr lang="ko-KR" altLang="en-US" dirty="0"/>
           </a:p>
@@ -32818,7 +32846,7 @@
           <a:p>
             <a:fld id="{0F78D9C4-20C1-4B15-A116-16DC77AD9A1E}" type="datetime1">
               <a:rPr lang="ko-KR" altLang="en-US" smtClean="0"/>
-              <a:t>2025-08-01</a:t>
+              <a:t>2025-08-21</a:t>
             </a:fld>
             <a:endParaRPr lang="ko-KR" altLang="en-US" dirty="0"/>
           </a:p>
@@ -32980,7 +33008,7 @@
           <a:p>
             <a:fld id="{0F78D9C4-20C1-4B15-A116-16DC77AD9A1E}" type="datetime1">
               <a:rPr lang="ko-KR" altLang="en-US" smtClean="0"/>
-              <a:t>2025-08-01</a:t>
+              <a:t>2025-08-21</a:t>
             </a:fld>
             <a:endParaRPr lang="ko-KR" altLang="en-US" dirty="0"/>
           </a:p>
